--- a/~sasano/lecture/proglang/26/proglang1-hosoku.pptx
+++ b/~sasano/lecture/proglang/26/proglang1-hosoku.pptx
@@ -215,7 +215,7 @@
             <a:fld id="{FACE8F3F-0A2D-40E0-A6E3-F946466A3D63}" type="datetimeFigureOut">
               <a:rPr kumimoji="1" lang="ja-JP" altLang="en-US" smtClean="0"/>
               <a:pPr/>
-              <a:t>2025/10/15</a:t>
+              <a:t>2026/9/28</a:t>
             </a:fld>
             <a:endParaRPr kumimoji="1" lang="ja-JP" altLang="en-US"/>
           </a:p>
@@ -789,7 +789,7 @@
             <a:fld id="{E90ED720-0104-4369-84BC-D37694168613}" type="datetimeFigureOut">
               <a:rPr kumimoji="1" lang="ja-JP" altLang="en-US" smtClean="0"/>
               <a:pPr/>
-              <a:t>2025/10/15</a:t>
+              <a:t>2026/9/28</a:t>
             </a:fld>
             <a:endParaRPr kumimoji="1" lang="ja-JP" altLang="en-US"/>
           </a:p>
@@ -986,7 +986,7 @@
             <a:fld id="{E90ED720-0104-4369-84BC-D37694168613}" type="datetimeFigureOut">
               <a:rPr kumimoji="1" lang="ja-JP" altLang="en-US" smtClean="0"/>
               <a:pPr/>
-              <a:t>2025/10/15</a:t>
+              <a:t>2026/9/28</a:t>
             </a:fld>
             <a:endParaRPr kumimoji="1" lang="ja-JP" altLang="en-US"/>
           </a:p>
@@ -1193,7 +1193,7 @@
             <a:fld id="{E90ED720-0104-4369-84BC-D37694168613}" type="datetimeFigureOut">
               <a:rPr kumimoji="1" lang="ja-JP" altLang="en-US" smtClean="0"/>
               <a:pPr/>
-              <a:t>2025/10/15</a:t>
+              <a:t>2026/9/28</a:t>
             </a:fld>
             <a:endParaRPr kumimoji="1" lang="ja-JP" altLang="en-US"/>
           </a:p>
@@ -1390,7 +1390,7 @@
             <a:fld id="{E90ED720-0104-4369-84BC-D37694168613}" type="datetimeFigureOut">
               <a:rPr kumimoji="1" lang="ja-JP" altLang="en-US" smtClean="0"/>
               <a:pPr/>
-              <a:t>2025/10/15</a:t>
+              <a:t>2026/9/28</a:t>
             </a:fld>
             <a:endParaRPr kumimoji="1" lang="ja-JP" altLang="en-US"/>
           </a:p>
@@ -1632,7 +1632,7 @@
             <a:fld id="{E90ED720-0104-4369-84BC-D37694168613}" type="datetimeFigureOut">
               <a:rPr kumimoji="1" lang="ja-JP" altLang="en-US" smtClean="0"/>
               <a:pPr/>
-              <a:t>2025/10/15</a:t>
+              <a:t>2026/9/28</a:t>
             </a:fld>
             <a:endParaRPr kumimoji="1" lang="ja-JP" altLang="en-US"/>
           </a:p>
@@ -1978,7 +1978,7 @@
             <a:fld id="{E90ED720-0104-4369-84BC-D37694168613}" type="datetimeFigureOut">
               <a:rPr kumimoji="1" lang="ja-JP" altLang="en-US" smtClean="0"/>
               <a:pPr/>
-              <a:t>2025/10/15</a:t>
+              <a:t>2026/9/28</a:t>
             </a:fld>
             <a:endParaRPr kumimoji="1" lang="ja-JP" altLang="en-US"/>
           </a:p>
@@ -2458,7 +2458,7 @@
             <a:fld id="{E90ED720-0104-4369-84BC-D37694168613}" type="datetimeFigureOut">
               <a:rPr kumimoji="1" lang="ja-JP" altLang="en-US" smtClean="0"/>
               <a:pPr/>
-              <a:t>2025/10/15</a:t>
+              <a:t>2026/9/28</a:t>
             </a:fld>
             <a:endParaRPr kumimoji="1" lang="ja-JP" altLang="en-US"/>
           </a:p>
@@ -2572,7 +2572,7 @@
             <a:fld id="{E90ED720-0104-4369-84BC-D37694168613}" type="datetimeFigureOut">
               <a:rPr kumimoji="1" lang="ja-JP" altLang="en-US" smtClean="0"/>
               <a:pPr/>
-              <a:t>2025/10/15</a:t>
+              <a:t>2026/9/28</a:t>
             </a:fld>
             <a:endParaRPr kumimoji="1" lang="ja-JP" altLang="en-US"/>
           </a:p>
@@ -2664,7 +2664,7 @@
             <a:fld id="{E90ED720-0104-4369-84BC-D37694168613}" type="datetimeFigureOut">
               <a:rPr kumimoji="1" lang="ja-JP" altLang="en-US" smtClean="0"/>
               <a:pPr/>
-              <a:t>2025/10/15</a:t>
+              <a:t>2026/9/28</a:t>
             </a:fld>
             <a:endParaRPr kumimoji="1" lang="ja-JP" altLang="en-US"/>
           </a:p>
@@ -2968,7 +2968,7 @@
             <a:fld id="{E90ED720-0104-4369-84BC-D37694168613}" type="datetimeFigureOut">
               <a:rPr kumimoji="1" lang="ja-JP" altLang="en-US" smtClean="0"/>
               <a:pPr/>
-              <a:t>2025/10/15</a:t>
+              <a:t>2026/9/28</a:t>
             </a:fld>
             <a:endParaRPr kumimoji="1" lang="ja-JP" altLang="en-US"/>
           </a:p>
@@ -3217,7 +3217,7 @@
             <a:fld id="{E90ED720-0104-4369-84BC-D37694168613}" type="datetimeFigureOut">
               <a:rPr kumimoji="1" lang="ja-JP" altLang="en-US" smtClean="0"/>
               <a:pPr/>
-              <a:t>2025/10/15</a:t>
+              <a:t>2026/9/28</a:t>
             </a:fld>
             <a:endParaRPr kumimoji="1" lang="ja-JP" altLang="en-US"/>
           </a:p>
@@ -3457,7 +3457,7 @@
             <a:fld id="{E90ED720-0104-4369-84BC-D37694168613}" type="datetimeFigureOut">
               <a:rPr kumimoji="1" lang="ja-JP" altLang="en-US" smtClean="0"/>
               <a:pPr/>
-              <a:t>2025/10/15</a:t>
+              <a:t>2026/9/28</a:t>
             </a:fld>
             <a:endParaRPr kumimoji="1" lang="ja-JP" altLang="en-US"/>
           </a:p>
@@ -3894,35 +3894,6 @@
                 </a:solidFill>
               </a:rPr>
               <a:t>篠埜　功</a:t>
-            </a:r>
-          </a:p>
-        </p:txBody>
-      </p:sp>
-      <p:sp>
-        <p:nvSpPr>
-          <p:cNvPr id="7" name="テキスト ボックス 6"/>
-          <p:cNvSpPr txBox="1"/>
-          <p:nvPr/>
-        </p:nvSpPr>
-        <p:spPr>
-          <a:xfrm>
-            <a:off x="3347864" y="4356393"/>
-            <a:ext cx="2236510" cy="584775"/>
-          </a:xfrm>
-          <a:prstGeom prst="rect">
-            <a:avLst/>
-          </a:prstGeom>
-          <a:noFill/>
-        </p:spPr>
-        <p:txBody>
-          <a:bodyPr wrap="none" rtlCol="0">
-            <a:spAutoFit/>
-          </a:bodyPr>
-          <a:lstStyle/>
-          <a:p>
-            <a:r>
-              <a:rPr kumimoji="1" lang="ja-JP" altLang="en-US" sz="3200" dirty="0"/>
-              <a:t>情報工学科</a:t>
             </a:r>
           </a:p>
         </p:txBody>
